--- a/docs/seminar/HyMeKo_Seminar.pptx
+++ b/docs/seminar/HyMeKo_Seminar.pptx
@@ -5,43 +5,43 @@
     <p:sldMasterId id="2147483648" r:id="rId1"/>
   </p:sldMasterIdLst>
   <p:notesMasterIdLst>
-    <p:notesMasterId r:id="rId30"/>
+    <p:notesMasterId r:id="rId36"/>
   </p:notesMasterIdLst>
   <p:sldIdLst>
     <p:sldId id="256" r:id="rId2"/>
-    <p:sldId id="290" r:id="rId41"/>
-    <p:sldId id="257" r:id="rId3"/>
-    <p:sldId id="289" r:id="rId40"/>
-    <p:sldId id="258" r:id="rId4"/>
-    <p:sldId id="259" r:id="rId5"/>
-    <p:sldId id="260" r:id="rId6"/>
-    <p:sldId id="261" r:id="rId7"/>
-    <p:sldId id="262" r:id="rId8"/>
-    <p:sldId id="263" r:id="rId9"/>
-    <p:sldId id="264" r:id="rId10"/>
-    <p:sldId id="265" r:id="rId11"/>
-    <p:sldId id="266" r:id="rId12"/>
-    <p:sldId id="267" r:id="rId13"/>
-    <p:sldId id="268" r:id="rId14"/>
-    <p:sldId id="269" r:id="rId15"/>
-    <p:sldId id="270" r:id="rId16"/>
-    <p:sldId id="271" r:id="rId17"/>
-    <p:sldId id="272" r:id="rId18"/>
-    <p:sldId id="285" r:id="rId36"/>
-    <p:sldId id="273" r:id="rId19"/>
-    <p:sldId id="286" r:id="rId37"/>
-    <p:sldId id="274" r:id="rId20"/>
-    <p:sldId id="275" r:id="rId21"/>
-    <p:sldId id="276" r:id="rId22"/>
-    <p:sldId id="284" r:id="rId35"/>
-    <p:sldId id="277" r:id="rId23"/>
-    <p:sldId id="281" r:id="rId27"/>
-    <p:sldId id="278" r:id="rId24"/>
-    <p:sldId id="288" r:id="rId39"/>
-    <p:sldId id="287" r:id="rId38"/>
-    <p:sldId id="279" r:id="rId25"/>
-    <p:sldId id="280" r:id="rId26"/>
-    <p:sldId id="283" r:id="rId29"/>
+    <p:sldId id="290" r:id="rId3"/>
+    <p:sldId id="257" r:id="rId4"/>
+    <p:sldId id="289" r:id="rId5"/>
+    <p:sldId id="258" r:id="rId6"/>
+    <p:sldId id="259" r:id="rId7"/>
+    <p:sldId id="260" r:id="rId8"/>
+    <p:sldId id="261" r:id="rId9"/>
+    <p:sldId id="262" r:id="rId10"/>
+    <p:sldId id="263" r:id="rId11"/>
+    <p:sldId id="264" r:id="rId12"/>
+    <p:sldId id="265" r:id="rId13"/>
+    <p:sldId id="266" r:id="rId14"/>
+    <p:sldId id="267" r:id="rId15"/>
+    <p:sldId id="268" r:id="rId16"/>
+    <p:sldId id="269" r:id="rId17"/>
+    <p:sldId id="270" r:id="rId18"/>
+    <p:sldId id="271" r:id="rId19"/>
+    <p:sldId id="272" r:id="rId20"/>
+    <p:sldId id="285" r:id="rId21"/>
+    <p:sldId id="273" r:id="rId22"/>
+    <p:sldId id="286" r:id="rId23"/>
+    <p:sldId id="274" r:id="rId24"/>
+    <p:sldId id="275" r:id="rId25"/>
+    <p:sldId id="276" r:id="rId26"/>
+    <p:sldId id="284" r:id="rId27"/>
+    <p:sldId id="277" r:id="rId28"/>
+    <p:sldId id="281" r:id="rId29"/>
+    <p:sldId id="278" r:id="rId30"/>
+    <p:sldId id="288" r:id="rId31"/>
+    <p:sldId id="287" r:id="rId32"/>
+    <p:sldId id="279" r:id="rId33"/>
+    <p:sldId id="280" r:id="rId34"/>
+    <p:sldId id="283" r:id="rId35"/>
   </p:sldIdLst>
   <p:sldSz cx="12192000" cy="6858000"/>
   <p:notesSz cx="6858000" cy="12192000"/>
@@ -2129,7 +2129,7 @@
           <a:p>
             <a:fld id="{F7021451-1387-4CA6-816F-3879F97B5CBC}" type="slidenum">
               <a:rPr lang="en-US"/>
-              <a:t>10</a:t>
+              <a:t>12</a:t>
             </a:fld>
             <a:endParaRPr lang="en-US"/>
           </a:p>
@@ -2213,7 +2213,7 @@
           <a:p>
             <a:fld id="{F7021451-1387-4CA6-816F-3879F97B5CBC}" type="slidenum">
               <a:rPr lang="en-US"/>
-              <a:t>11</a:t>
+              <a:t>13</a:t>
             </a:fld>
             <a:endParaRPr lang="en-US"/>
           </a:p>
@@ -2297,7 +2297,7 @@
           <a:p>
             <a:fld id="{F7021451-1387-4CA6-816F-3879F97B5CBC}" type="slidenum">
               <a:rPr lang="en-US"/>
-              <a:t>12</a:t>
+              <a:t>14</a:t>
             </a:fld>
             <a:endParaRPr lang="en-US"/>
           </a:p>
@@ -2381,7 +2381,7 @@
           <a:p>
             <a:fld id="{F7021451-1387-4CA6-816F-3879F97B5CBC}" type="slidenum">
               <a:rPr lang="en-US"/>
-              <a:t>13</a:t>
+              <a:t>15</a:t>
             </a:fld>
             <a:endParaRPr lang="en-US"/>
           </a:p>
@@ -2465,7 +2465,7 @@
           <a:p>
             <a:fld id="{F7021451-1387-4CA6-816F-3879F97B5CBC}" type="slidenum">
               <a:rPr lang="en-US"/>
-              <a:t>14</a:t>
+              <a:t>16</a:t>
             </a:fld>
             <a:endParaRPr lang="en-US"/>
           </a:p>
@@ -2549,7 +2549,7 @@
           <a:p>
             <a:fld id="{F7021451-1387-4CA6-816F-3879F97B5CBC}" type="slidenum">
               <a:rPr lang="en-US"/>
-              <a:t>15</a:t>
+              <a:t>17</a:t>
             </a:fld>
             <a:endParaRPr lang="en-US"/>
           </a:p>
@@ -2633,7 +2633,7 @@
           <a:p>
             <a:fld id="{F7021451-1387-4CA6-816F-3879F97B5CBC}" type="slidenum">
               <a:rPr lang="en-US"/>
-              <a:t>16</a:t>
+              <a:t>18</a:t>
             </a:fld>
             <a:endParaRPr lang="en-US"/>
           </a:p>
@@ -2717,7 +2717,7 @@
           <a:p>
             <a:fld id="{F7021451-1387-4CA6-816F-3879F97B5CBC}" type="slidenum">
               <a:rPr lang="en-US"/>
-              <a:t>17</a:t>
+              <a:t>19</a:t>
             </a:fld>
             <a:endParaRPr lang="en-US"/>
           </a:p>
@@ -2801,7 +2801,7 @@
           <a:p>
             <a:fld id="{F7021451-1387-4CA6-816F-3879F97B5CBC}" type="slidenum">
               <a:rPr lang="en-US"/>
-              <a:t>18</a:t>
+              <a:t>21</a:t>
             </a:fld>
             <a:endParaRPr lang="en-US"/>
           </a:p>
@@ -2885,7 +2885,7 @@
           <a:p>
             <a:fld id="{F7021451-1387-4CA6-816F-3879F97B5CBC}" type="slidenum">
               <a:rPr lang="en-US"/>
-              <a:t>19</a:t>
+              <a:t>23</a:t>
             </a:fld>
             <a:endParaRPr lang="en-US"/>
           </a:p>
@@ -2969,7 +2969,7 @@
           <a:p>
             <a:fld id="{F7021451-1387-4CA6-816F-3879F97B5CBC}" type="slidenum">
               <a:rPr lang="en-US"/>
-              <a:t>2</a:t>
+              <a:t>3</a:t>
             </a:fld>
             <a:endParaRPr lang="en-US"/>
           </a:p>
@@ -3053,7 +3053,7 @@
           <a:p>
             <a:fld id="{F7021451-1387-4CA6-816F-3879F97B5CBC}" type="slidenum">
               <a:rPr lang="en-US"/>
-              <a:t>20</a:t>
+              <a:t>24</a:t>
             </a:fld>
             <a:endParaRPr lang="en-US"/>
           </a:p>
@@ -3137,7 +3137,7 @@
           <a:p>
             <a:fld id="{F7021451-1387-4CA6-816F-3879F97B5CBC}" type="slidenum">
               <a:rPr lang="en-US"/>
-              <a:t>21</a:t>
+              <a:t>25</a:t>
             </a:fld>
             <a:endParaRPr lang="en-US"/>
           </a:p>
@@ -3221,7 +3221,7 @@
           <a:p>
             <a:fld id="{F7021451-1387-4CA6-816F-3879F97B5CBC}" type="slidenum">
               <a:rPr lang="en-US"/>
-              <a:t>22</a:t>
+              <a:t>27</a:t>
             </a:fld>
             <a:endParaRPr lang="en-US"/>
           </a:p>
@@ -3305,7 +3305,7 @@
           <a:p>
             <a:fld id="{F7021451-1387-4CA6-816F-3879F97B5CBC}" type="slidenum">
               <a:rPr lang="en-US"/>
-              <a:t>23</a:t>
+              <a:t>28</a:t>
             </a:fld>
             <a:endParaRPr lang="en-US"/>
           </a:p>
@@ -3389,7 +3389,7 @@
           <a:p>
             <a:fld id="{F7021451-1387-4CA6-816F-3879F97B5CBC}" type="slidenum">
               <a:rPr lang="en-US"/>
-              <a:t>24</a:t>
+              <a:t>29</a:t>
             </a:fld>
             <a:endParaRPr lang="en-US"/>
           </a:p>
@@ -3473,7 +3473,7 @@
           <a:p>
             <a:fld id="{F7021451-1387-4CA6-816F-3879F97B5CBC}" type="slidenum">
               <a:rPr lang="en-US"/>
-              <a:t>25</a:t>
+              <a:t>32</a:t>
             </a:fld>
             <a:endParaRPr lang="en-US"/>
           </a:p>
@@ -3557,7 +3557,7 @@
           <a:p>
             <a:fld id="{F7021451-1387-4CA6-816F-3879F97B5CBC}" type="slidenum">
               <a:rPr lang="en-US"/>
-              <a:t>26</a:t>
+              <a:t>33</a:t>
             </a:fld>
             <a:endParaRPr lang="en-US"/>
           </a:p>
@@ -3576,7 +3576,7 @@
 </p:notes>
 </file>
 
-<file path=ppt/notesSlides/notesSlide28.xml><?xml version="1.0" encoding="utf-8"?>
+<file path=ppt/notesSlides/notesSlide27.xml><?xml version="1.0" encoding="utf-8"?>
 <p:notes xmlns:a="http://schemas.openxmlformats.org/drawingml/2006/main" xmlns:r="http://schemas.openxmlformats.org/officeDocument/2006/relationships" xmlns:p="http://schemas.openxmlformats.org/presentationml/2006/main">
   <p:cSld>
     <p:spTree>
@@ -3641,7 +3641,7 @@
           <a:p>
             <a:fld id="{F7021451-1387-4CA6-816F-3879F97B5CBC}" type="slidenum">
               <a:rPr lang="en-US"/>
-              <a:t>28</a:t>
+              <a:t>34</a:t>
             </a:fld>
             <a:endParaRPr lang="en-US"/>
           </a:p>
@@ -3725,7 +3725,7 @@
           <a:p>
             <a:fld id="{F7021451-1387-4CA6-816F-3879F97B5CBC}" type="slidenum">
               <a:rPr lang="en-US"/>
-              <a:t>3</a:t>
+              <a:t>5</a:t>
             </a:fld>
             <a:endParaRPr lang="en-US"/>
           </a:p>
@@ -3809,7 +3809,7 @@
           <a:p>
             <a:fld id="{F7021451-1387-4CA6-816F-3879F97B5CBC}" type="slidenum">
               <a:rPr lang="en-US"/>
-              <a:t>4</a:t>
+              <a:t>6</a:t>
             </a:fld>
             <a:endParaRPr lang="en-US"/>
           </a:p>
@@ -3893,7 +3893,7 @@
           <a:p>
             <a:fld id="{F7021451-1387-4CA6-816F-3879F97B5CBC}" type="slidenum">
               <a:rPr lang="en-US"/>
-              <a:t>5</a:t>
+              <a:t>7</a:t>
             </a:fld>
             <a:endParaRPr lang="en-US"/>
           </a:p>
@@ -3977,7 +3977,7 @@
           <a:p>
             <a:fld id="{F7021451-1387-4CA6-816F-3879F97B5CBC}" type="slidenum">
               <a:rPr lang="en-US"/>
-              <a:t>6</a:t>
+              <a:t>8</a:t>
             </a:fld>
             <a:endParaRPr lang="en-US"/>
           </a:p>
@@ -4061,7 +4061,7 @@
           <a:p>
             <a:fld id="{F7021451-1387-4CA6-816F-3879F97B5CBC}" type="slidenum">
               <a:rPr lang="en-US"/>
-              <a:t>7</a:t>
+              <a:t>9</a:t>
             </a:fld>
             <a:endParaRPr lang="en-US"/>
           </a:p>
@@ -4145,7 +4145,7 @@
           <a:p>
             <a:fld id="{F7021451-1387-4CA6-816F-3879F97B5CBC}" type="slidenum">
               <a:rPr lang="en-US"/>
-              <a:t>8</a:t>
+              <a:t>10</a:t>
             </a:fld>
             <a:endParaRPr lang="en-US"/>
           </a:p>
@@ -4229,7 +4229,7 @@
           <a:p>
             <a:fld id="{F7021451-1387-4CA6-816F-3879F97B5CBC}" type="slidenum">
               <a:rPr lang="en-US"/>
-              <a:t>9</a:t>
+              <a:t>11</a:t>
             </a:fld>
             <a:endParaRPr lang="en-US"/>
           </a:p>
@@ -13086,7 +13086,7 @@
 </file>
 
 <file path=ppt/slides/slide2.xml><?xml version="1.0" encoding="utf-8"?>
-<p:sld xmlns:a="http://schemas.openxmlformats.org/drawingml/2006/main" xmlns:p="http://schemas.openxmlformats.org/presentationml/2006/main" xmlns:r="http://schemas.openxmlformats.org/officeDocument/2006/relationships">
+<p:sld xmlns:a="http://schemas.openxmlformats.org/drawingml/2006/main" xmlns:r="http://schemas.openxmlformats.org/officeDocument/2006/relationships" xmlns:p="http://schemas.openxmlformats.org/presentationml/2006/main">
   <p:cSld>
     <p:bg>
       <p:bgPr>
@@ -13102,7 +13102,14 @@
         <p:cNvGrpSpPr/>
         <p:nvPr/>
       </p:nvGrpSpPr>
-      <p:grpSpPr/>
+      <p:grpSpPr>
+        <a:xfrm>
+          <a:off x="0" y="0"/>
+          <a:ext cx="0" cy="0"/>
+          <a:chOff x="0" y="0"/>
+          <a:chExt cx="0" cy="0"/>
+        </a:xfrm>
+      </p:grpSpPr>
       <p:sp>
         <p:nvSpPr>
           <p:cNvPr id="2" name="TextBox 1"/>
@@ -13120,7 +13127,7 @@
           <a:noFill/>
         </p:spPr>
         <p:txBody>
-          <a:bodyPr wrap="square" anchor="ctr" lIns="0" rIns="0" tIns="0" bIns="0">
+          <a:bodyPr wrap="square" lIns="0" tIns="0" rIns="0" bIns="0" anchor="ctr">
             <a:spAutoFit/>
           </a:bodyPr>
           <a:lstStyle/>
@@ -13159,7 +13166,7 @@
           <a:noFill/>
         </p:spPr>
         <p:txBody>
-          <a:bodyPr wrap="square" anchor="t" lIns="0" rIns="0" tIns="0" bIns="0">
+          <a:bodyPr wrap="square" lIns="0" tIns="0" rIns="0" bIns="0" anchor="t">
             <a:spAutoFit/>
           </a:bodyPr>
           <a:lstStyle/>
@@ -13198,7 +13205,7 @@
           <a:noFill/>
         </p:spPr>
         <p:txBody>
-          <a:bodyPr wrap="square" anchor="t" lIns="0" rIns="0" tIns="0" bIns="0">
+          <a:bodyPr wrap="square" lIns="0" tIns="0" rIns="0" bIns="0" anchor="t">
             <a:spAutoFit/>
           </a:bodyPr>
           <a:lstStyle/>
@@ -13265,6 +13272,7 @@
           <a:lstStyle/>
           <a:p>
             <a:pPr algn="ctr"/>
+            <a:endParaRPr/>
           </a:p>
         </p:txBody>
       </p:sp>
@@ -13309,6 +13317,7 @@
           <a:lstStyle/>
           <a:p>
             <a:pPr algn="ctr"/>
+            <a:endParaRPr/>
           </a:p>
         </p:txBody>
       </p:sp>
@@ -13329,7 +13338,7 @@
           <a:noFill/>
         </p:spPr>
         <p:txBody>
-          <a:bodyPr wrap="square" anchor="t" lIns="0" rIns="0" tIns="0" bIns="0">
+          <a:bodyPr wrap="square" lIns="0" tIns="0" rIns="0" bIns="0" anchor="t">
             <a:spAutoFit/>
           </a:bodyPr>
           <a:lstStyle/>
@@ -13368,7 +13377,7 @@
           <a:noFill/>
         </p:spPr>
         <p:txBody>
-          <a:bodyPr wrap="square" anchor="t" lIns="0" rIns="0" tIns="0" bIns="0">
+          <a:bodyPr wrap="square" lIns="0" tIns="0" rIns="0" bIns="0" anchor="t">
             <a:spAutoFit/>
           </a:bodyPr>
           <a:lstStyle/>
@@ -13435,6 +13444,7 @@
           <a:lstStyle/>
           <a:p>
             <a:pPr algn="ctr"/>
+            <a:endParaRPr/>
           </a:p>
         </p:txBody>
       </p:sp>
@@ -13479,6 +13489,7 @@
           <a:lstStyle/>
           <a:p>
             <a:pPr algn="ctr"/>
+            <a:endParaRPr/>
           </a:p>
         </p:txBody>
       </p:sp>
@@ -13499,7 +13510,7 @@
           <a:noFill/>
         </p:spPr>
         <p:txBody>
-          <a:bodyPr wrap="square" anchor="t" lIns="0" rIns="0" tIns="0" bIns="0">
+          <a:bodyPr wrap="square" lIns="0" tIns="0" rIns="0" bIns="0" anchor="t">
             <a:spAutoFit/>
           </a:bodyPr>
           <a:lstStyle/>
@@ -13538,7 +13549,7 @@
           <a:noFill/>
         </p:spPr>
         <p:txBody>
-          <a:bodyPr wrap="square" anchor="t" lIns="0" rIns="0" tIns="0" bIns="0">
+          <a:bodyPr wrap="square" lIns="0" tIns="0" rIns="0" bIns="0" anchor="t">
             <a:spAutoFit/>
           </a:bodyPr>
           <a:lstStyle/>
@@ -13605,6 +13616,7 @@
           <a:lstStyle/>
           <a:p>
             <a:pPr algn="ctr"/>
+            <a:endParaRPr/>
           </a:p>
         </p:txBody>
       </p:sp>
@@ -13649,6 +13661,7 @@
           <a:lstStyle/>
           <a:p>
             <a:pPr algn="ctr"/>
+            <a:endParaRPr/>
           </a:p>
         </p:txBody>
       </p:sp>
@@ -13669,7 +13682,7 @@
           <a:noFill/>
         </p:spPr>
         <p:txBody>
-          <a:bodyPr wrap="square" anchor="t" lIns="0" rIns="0" tIns="0" bIns="0">
+          <a:bodyPr wrap="square" lIns="0" tIns="0" rIns="0" bIns="0" anchor="t">
             <a:spAutoFit/>
           </a:bodyPr>
           <a:lstStyle/>
@@ -13708,7 +13721,7 @@
           <a:noFill/>
         </p:spPr>
         <p:txBody>
-          <a:bodyPr wrap="square" anchor="t" lIns="0" rIns="0" tIns="0" bIns="0">
+          <a:bodyPr wrap="square" lIns="0" tIns="0" rIns="0" bIns="0" anchor="t">
             <a:spAutoFit/>
           </a:bodyPr>
           <a:lstStyle/>
@@ -13775,6 +13788,7 @@
           <a:lstStyle/>
           <a:p>
             <a:pPr algn="ctr"/>
+            <a:endParaRPr/>
           </a:p>
         </p:txBody>
       </p:sp>
@@ -13819,6 +13833,7 @@
           <a:lstStyle/>
           <a:p>
             <a:pPr algn="ctr"/>
+            <a:endParaRPr/>
           </a:p>
         </p:txBody>
       </p:sp>
@@ -13839,7 +13854,7 @@
           <a:noFill/>
         </p:spPr>
         <p:txBody>
-          <a:bodyPr wrap="square" anchor="t" lIns="0" rIns="0" tIns="0" bIns="0">
+          <a:bodyPr wrap="square" lIns="0" tIns="0" rIns="0" bIns="0" anchor="t">
             <a:spAutoFit/>
           </a:bodyPr>
           <a:lstStyle/>
@@ -13878,7 +13893,7 @@
           <a:noFill/>
         </p:spPr>
         <p:txBody>
-          <a:bodyPr wrap="square" anchor="t" lIns="0" rIns="0" tIns="0" bIns="0">
+          <a:bodyPr wrap="square" lIns="0" tIns="0" rIns="0" bIns="0" anchor="t">
             <a:spAutoFit/>
           </a:bodyPr>
           <a:lstStyle/>
@@ -13917,7 +13932,7 @@
           <a:noFill/>
         </p:spPr>
         <p:txBody>
-          <a:bodyPr wrap="square" anchor="t" lIns="0" rIns="0" tIns="0" bIns="0">
+          <a:bodyPr wrap="square" lIns="0" tIns="0" rIns="0" bIns="0" anchor="t">
             <a:spAutoFit/>
           </a:bodyPr>
           <a:lstStyle/>
@@ -13983,7 +13998,7 @@
 </file>
 
 <file path=ppt/slides/slide20.xml><?xml version="1.0" encoding="utf-8"?>
-<p:sld xmlns:a="http://schemas.openxmlformats.org/drawingml/2006/main" xmlns:p="http://schemas.openxmlformats.org/presentationml/2006/main" xmlns:r="http://schemas.openxmlformats.org/officeDocument/2006/relationships">
+<p:sld xmlns:a="http://schemas.openxmlformats.org/drawingml/2006/main" xmlns:r="http://schemas.openxmlformats.org/officeDocument/2006/relationships" xmlns:p="http://schemas.openxmlformats.org/presentationml/2006/main">
   <p:cSld>
     <p:bg>
       <p:bgPr>
@@ -13999,7 +14014,14 @@
         <p:cNvGrpSpPr/>
         <p:nvPr/>
       </p:nvGrpSpPr>
-      <p:grpSpPr/>
+      <p:grpSpPr>
+        <a:xfrm>
+          <a:off x="0" y="0"/>
+          <a:ext cx="0" cy="0"/>
+          <a:chOff x="0" y="0"/>
+          <a:chExt cx="0" cy="0"/>
+        </a:xfrm>
+      </p:grpSpPr>
       <p:sp>
         <p:nvSpPr>
           <p:cNvPr id="2" name="TextBox 1"/>
@@ -14017,7 +14039,7 @@
           <a:noFill/>
         </p:spPr>
         <p:txBody>
-          <a:bodyPr wrap="square" anchor="ctr" lIns="0" rIns="0" tIns="0" bIns="0">
+          <a:bodyPr wrap="square" lIns="0" tIns="0" rIns="0" bIns="0" anchor="ctr">
             <a:spAutoFit/>
           </a:bodyPr>
           <a:lstStyle/>
@@ -14082,6 +14104,7 @@
           <a:lstStyle/>
           <a:p>
             <a:pPr algn="ctr"/>
+            <a:endParaRPr/>
           </a:p>
         </p:txBody>
       </p:sp>
@@ -14102,7 +14125,7 @@
           <a:noFill/>
         </p:spPr>
         <p:txBody>
-          <a:bodyPr wrap="square" anchor="ctr" lIns="0" rIns="0" tIns="0" bIns="0">
+          <a:bodyPr wrap="square" lIns="0" tIns="0" rIns="0" bIns="0" anchor="ctr">
             <a:spAutoFit/>
           </a:bodyPr>
           <a:lstStyle/>
@@ -14141,7 +14164,7 @@
           <a:noFill/>
         </p:spPr>
         <p:txBody>
-          <a:bodyPr wrap="square" anchor="t" lIns="0" rIns="0" tIns="0" bIns="0">
+          <a:bodyPr wrap="square" lIns="0" tIns="0" rIns="0" bIns="0" anchor="t">
             <a:spAutoFit/>
           </a:bodyPr>
           <a:lstStyle/>
@@ -14180,7 +14203,7 @@
           <a:noFill/>
         </p:spPr>
         <p:txBody>
-          <a:bodyPr wrap="square" anchor="t" lIns="0" rIns="0" tIns="0" bIns="0">
+          <a:bodyPr wrap="square" lIns="0" tIns="0" rIns="0" bIns="0" anchor="t">
             <a:spAutoFit/>
           </a:bodyPr>
           <a:lstStyle/>
@@ -14256,6 +14279,7 @@
           <a:lstStyle/>
           <a:p>
             <a:pPr algn="ctr"/>
+            <a:endParaRPr/>
           </a:p>
         </p:txBody>
       </p:sp>
@@ -14300,6 +14324,7 @@
           <a:lstStyle/>
           <a:p>
             <a:pPr algn="ctr"/>
+            <a:endParaRPr/>
           </a:p>
         </p:txBody>
       </p:sp>
@@ -14320,7 +14345,7 @@
           <a:noFill/>
         </p:spPr>
         <p:txBody>
-          <a:bodyPr wrap="square" anchor="t" lIns="0" rIns="0" tIns="0" bIns="0">
+          <a:bodyPr wrap="square" lIns="0" tIns="0" rIns="0" bIns="0" anchor="t">
             <a:spAutoFit/>
           </a:bodyPr>
           <a:lstStyle/>
@@ -14359,7 +14384,7 @@
           <a:noFill/>
         </p:spPr>
         <p:txBody>
-          <a:bodyPr wrap="square" anchor="t" lIns="0" rIns="0" tIns="0" bIns="0">
+          <a:bodyPr wrap="square" lIns="0" tIns="0" rIns="0" bIns="0" anchor="t">
             <a:spAutoFit/>
           </a:bodyPr>
           <a:lstStyle/>
@@ -14426,6 +14451,7 @@
           <a:lstStyle/>
           <a:p>
             <a:pPr algn="ctr"/>
+            <a:endParaRPr/>
           </a:p>
         </p:txBody>
       </p:sp>
@@ -14470,6 +14496,7 @@
           <a:lstStyle/>
           <a:p>
             <a:pPr algn="ctr"/>
+            <a:endParaRPr/>
           </a:p>
         </p:txBody>
       </p:sp>
@@ -14490,7 +14517,7 @@
           <a:noFill/>
         </p:spPr>
         <p:txBody>
-          <a:bodyPr wrap="square" anchor="t" lIns="0" rIns="0" tIns="0" bIns="0">
+          <a:bodyPr wrap="square" lIns="0" tIns="0" rIns="0" bIns="0" anchor="t">
             <a:spAutoFit/>
           </a:bodyPr>
           <a:lstStyle/>
@@ -14529,7 +14556,7 @@
           <a:noFill/>
         </p:spPr>
         <p:txBody>
-          <a:bodyPr wrap="square" anchor="t" lIns="0" rIns="0" tIns="0" bIns="0">
+          <a:bodyPr wrap="square" lIns="0" tIns="0" rIns="0" bIns="0" anchor="t">
             <a:spAutoFit/>
           </a:bodyPr>
           <a:lstStyle/>
@@ -14596,6 +14623,7 @@
           <a:lstStyle/>
           <a:p>
             <a:pPr algn="ctr"/>
+            <a:endParaRPr/>
           </a:p>
         </p:txBody>
       </p:sp>
@@ -14640,6 +14668,7 @@
           <a:lstStyle/>
           <a:p>
             <a:pPr algn="ctr"/>
+            <a:endParaRPr/>
           </a:p>
         </p:txBody>
       </p:sp>
@@ -14660,7 +14689,7 @@
           <a:noFill/>
         </p:spPr>
         <p:txBody>
-          <a:bodyPr wrap="square" anchor="t" lIns="0" rIns="0" tIns="0" bIns="0">
+          <a:bodyPr wrap="square" lIns="0" tIns="0" rIns="0" bIns="0" anchor="t">
             <a:spAutoFit/>
           </a:bodyPr>
           <a:lstStyle/>
@@ -14699,7 +14728,7 @@
           <a:noFill/>
         </p:spPr>
         <p:txBody>
-          <a:bodyPr wrap="square" anchor="t" lIns="0" rIns="0" tIns="0" bIns="0">
+          <a:bodyPr wrap="square" lIns="0" tIns="0" rIns="0" bIns="0" anchor="t">
             <a:spAutoFit/>
           </a:bodyPr>
           <a:lstStyle/>
@@ -14738,7 +14767,7 @@
           <a:noFill/>
         </p:spPr>
         <p:txBody>
-          <a:bodyPr wrap="square" anchor="t" lIns="0" rIns="0" tIns="0" bIns="0">
+          <a:bodyPr wrap="square" lIns="0" tIns="0" rIns="0" bIns="0" anchor="t">
             <a:spAutoFit/>
           </a:bodyPr>
           <a:lstStyle/>
@@ -14777,7 +14806,7 @@
           <a:noFill/>
         </p:spPr>
         <p:txBody>
-          <a:bodyPr wrap="square" anchor="t" lIns="0" rIns="0" tIns="0" bIns="0">
+          <a:bodyPr wrap="square" lIns="0" tIns="0" rIns="0" bIns="0" anchor="t">
             <a:spAutoFit/>
           </a:bodyPr>
           <a:lstStyle/>
@@ -15518,7 +15547,7 @@
 </file>
 
 <file path=ppt/slides/slide22.xml><?xml version="1.0" encoding="utf-8"?>
-<p:sld xmlns:a="http://schemas.openxmlformats.org/drawingml/2006/main" xmlns:p="http://schemas.openxmlformats.org/presentationml/2006/main" xmlns:r="http://schemas.openxmlformats.org/officeDocument/2006/relationships">
+<p:sld xmlns:a="http://schemas.openxmlformats.org/drawingml/2006/main" xmlns:r="http://schemas.openxmlformats.org/officeDocument/2006/relationships" xmlns:p="http://schemas.openxmlformats.org/presentationml/2006/main">
   <p:cSld>
     <p:bg>
       <p:bgPr>
@@ -15534,7 +15563,14 @@
         <p:cNvGrpSpPr/>
         <p:nvPr/>
       </p:nvGrpSpPr>
-      <p:grpSpPr/>
+      <p:grpSpPr>
+        <a:xfrm>
+          <a:off x="0" y="0"/>
+          <a:ext cx="0" cy="0"/>
+          <a:chOff x="0" y="0"/>
+          <a:chExt cx="0" cy="0"/>
+        </a:xfrm>
+      </p:grpSpPr>
       <p:sp>
         <p:nvSpPr>
           <p:cNvPr id="2" name="TextBox 1"/>
@@ -15552,7 +15588,7 @@
           <a:noFill/>
         </p:spPr>
         <p:txBody>
-          <a:bodyPr wrap="square" anchor="ctr" lIns="0" rIns="0" tIns="0" bIns="0">
+          <a:bodyPr wrap="square" lIns="0" tIns="0" rIns="0" bIns="0" anchor="ctr">
             <a:spAutoFit/>
           </a:bodyPr>
           <a:lstStyle/>
@@ -15617,6 +15653,7 @@
           <a:lstStyle/>
           <a:p>
             <a:pPr algn="ctr"/>
+            <a:endParaRPr/>
           </a:p>
         </p:txBody>
       </p:sp>
@@ -15637,7 +15674,7 @@
           <a:noFill/>
         </p:spPr>
         <p:txBody>
-          <a:bodyPr wrap="square" anchor="ctr" lIns="0" rIns="0" tIns="0" bIns="0">
+          <a:bodyPr wrap="square" lIns="0" tIns="0" rIns="0" bIns="0" anchor="ctr">
             <a:spAutoFit/>
           </a:bodyPr>
           <a:lstStyle/>
@@ -15676,7 +15713,7 @@
           <a:noFill/>
         </p:spPr>
         <p:txBody>
-          <a:bodyPr wrap="square" anchor="t" lIns="0" rIns="0" tIns="0" bIns="0">
+          <a:bodyPr wrap="square" lIns="0" tIns="0" rIns="0" bIns="0" anchor="t">
             <a:spAutoFit/>
           </a:bodyPr>
           <a:lstStyle/>
@@ -15743,6 +15780,7 @@
           <a:lstStyle/>
           <a:p>
             <a:pPr algn="ctr"/>
+            <a:endParaRPr/>
           </a:p>
         </p:txBody>
       </p:sp>
@@ -15787,6 +15825,7 @@
           <a:lstStyle/>
           <a:p>
             <a:pPr algn="ctr"/>
+            <a:endParaRPr/>
           </a:p>
         </p:txBody>
       </p:sp>
@@ -15807,7 +15846,7 @@
           <a:noFill/>
         </p:spPr>
         <p:txBody>
-          <a:bodyPr wrap="square" anchor="t" lIns="0" rIns="0" tIns="0" bIns="0">
+          <a:bodyPr wrap="square" lIns="0" tIns="0" rIns="0" bIns="0" anchor="t">
             <a:spAutoFit/>
           </a:bodyPr>
           <a:lstStyle/>
@@ -15898,6 +15937,7 @@
           <a:lstStyle/>
           <a:p>
             <a:pPr algn="ctr"/>
+            <a:endParaRPr/>
           </a:p>
         </p:txBody>
       </p:sp>
@@ -15942,6 +15982,7 @@
           <a:lstStyle/>
           <a:p>
             <a:pPr algn="ctr"/>
+            <a:endParaRPr/>
           </a:p>
         </p:txBody>
       </p:sp>
@@ -15962,7 +16003,7 @@
           <a:noFill/>
         </p:spPr>
         <p:txBody>
-          <a:bodyPr wrap="square" anchor="t" lIns="0" rIns="0" tIns="0" bIns="0">
+          <a:bodyPr wrap="square" lIns="0" tIns="0" rIns="0" bIns="0" anchor="t">
             <a:spAutoFit/>
           </a:bodyPr>
           <a:lstStyle/>
@@ -16025,7 +16066,7 @@
           <a:noFill/>
         </p:spPr>
         <p:txBody>
-          <a:bodyPr wrap="square" anchor="t" lIns="0" rIns="0" tIns="0" bIns="0">
+          <a:bodyPr wrap="square" lIns="0" tIns="0" rIns="0" bIns="0" anchor="t">
             <a:spAutoFit/>
           </a:bodyPr>
           <a:lstStyle/>
@@ -16064,7 +16105,7 @@
           <a:noFill/>
         </p:spPr>
         <p:txBody>
-          <a:bodyPr wrap="square" anchor="t" lIns="0" rIns="0" tIns="0" bIns="0">
+          <a:bodyPr wrap="square" lIns="0" tIns="0" rIns="0" bIns="0" anchor="t">
             <a:spAutoFit/>
           </a:bodyPr>
           <a:lstStyle/>
@@ -16103,7 +16144,7 @@
           <a:noFill/>
         </p:spPr>
         <p:txBody>
-          <a:bodyPr wrap="square" anchor="t" lIns="0" rIns="0" tIns="0" bIns="0">
+          <a:bodyPr wrap="square" lIns="0" tIns="0" rIns="0" bIns="0" anchor="t">
             <a:spAutoFit/>
           </a:bodyPr>
           <a:lstStyle/>
@@ -19791,7 +19832,18 @@
                 <a:ea typeface="Futura" pitchFamily="34" charset="-122"/>
                 <a:cs typeface="Futura" pitchFamily="34" charset="-120"/>
               </a:rPr>
-              <a:t>11×</a:t>
+              <a:t>11</a:t>
+            </a:r>
+            <a:r>
+              <a:rPr lang="hu-HU" sz="3600" b="1" dirty="0">
+                <a:solidFill>
+                  <a:srgbClr val="2563EB"/>
+                </a:solidFill>
+                <a:latin typeface="Futura" pitchFamily="34" charset="0"/>
+                <a:ea typeface="Futura" pitchFamily="34" charset="-122"/>
+                <a:cs typeface="Futura" pitchFamily="34" charset="-120"/>
+              </a:rPr>
+              <a:t>x</a:t>
             </a:r>
             <a:endParaRPr lang="en-US" sz="3600" dirty="0"/>
           </a:p>
@@ -20488,7 +20540,7 @@
 </file>
 
 <file path=ppt/slides/slide26.xml><?xml version="1.0" encoding="utf-8"?>
-<p:sld xmlns:a="http://schemas.openxmlformats.org/drawingml/2006/main" xmlns:p="http://schemas.openxmlformats.org/presentationml/2006/main" xmlns:r="http://schemas.openxmlformats.org/officeDocument/2006/relationships">
+<p:sld xmlns:a="http://schemas.openxmlformats.org/drawingml/2006/main" xmlns:r="http://schemas.openxmlformats.org/officeDocument/2006/relationships" xmlns:p="http://schemas.openxmlformats.org/presentationml/2006/main">
   <p:cSld>
     <p:bg>
       <p:bgPr>
@@ -20504,7 +20556,14 @@
         <p:cNvGrpSpPr/>
         <p:nvPr/>
       </p:nvGrpSpPr>
-      <p:grpSpPr/>
+      <p:grpSpPr>
+        <a:xfrm>
+          <a:off x="0" y="0"/>
+          <a:ext cx="0" cy="0"/>
+          <a:chOff x="0" y="0"/>
+          <a:chExt cx="0" cy="0"/>
+        </a:xfrm>
+      </p:grpSpPr>
       <p:sp>
         <p:nvSpPr>
           <p:cNvPr id="2" name="TextBox 1"/>
@@ -20522,7 +20581,7 @@
           <a:noFill/>
         </p:spPr>
         <p:txBody>
-          <a:bodyPr wrap="square" anchor="ctr" lIns="0" rIns="0" tIns="0" bIns="0">
+          <a:bodyPr wrap="square" lIns="0" tIns="0" rIns="0" bIns="0" anchor="ctr">
             <a:spAutoFit/>
           </a:bodyPr>
           <a:lstStyle/>
@@ -20587,6 +20646,7 @@
           <a:lstStyle/>
           <a:p>
             <a:pPr algn="ctr"/>
+            <a:endParaRPr/>
           </a:p>
         </p:txBody>
       </p:sp>
@@ -20607,7 +20667,7 @@
           <a:noFill/>
         </p:spPr>
         <p:txBody>
-          <a:bodyPr wrap="square" anchor="ctr" lIns="0" rIns="0" tIns="0" bIns="0">
+          <a:bodyPr wrap="square" lIns="0" tIns="0" rIns="0" bIns="0" anchor="ctr">
             <a:spAutoFit/>
           </a:bodyPr>
           <a:lstStyle/>
@@ -20646,7 +20706,7 @@
           <a:noFill/>
         </p:spPr>
         <p:txBody>
-          <a:bodyPr wrap="square" anchor="t" lIns="0" rIns="0" tIns="0" bIns="0">
+          <a:bodyPr wrap="square" lIns="0" tIns="0" rIns="0" bIns="0" anchor="t">
             <a:spAutoFit/>
           </a:bodyPr>
           <a:lstStyle/>
@@ -20713,6 +20773,7 @@
           <a:lstStyle/>
           <a:p>
             <a:pPr algn="ctr"/>
+            <a:endParaRPr/>
           </a:p>
         </p:txBody>
       </p:sp>
@@ -20757,6 +20818,7 @@
           <a:lstStyle/>
           <a:p>
             <a:pPr algn="ctr"/>
+            <a:endParaRPr/>
           </a:p>
         </p:txBody>
       </p:sp>
@@ -20777,7 +20839,7 @@
           <a:noFill/>
         </p:spPr>
         <p:txBody>
-          <a:bodyPr wrap="square" anchor="t" lIns="0" rIns="0" tIns="0" bIns="0">
+          <a:bodyPr wrap="square" lIns="0" tIns="0" rIns="0" bIns="0" anchor="t">
             <a:spAutoFit/>
           </a:bodyPr>
           <a:lstStyle/>
@@ -20816,7 +20878,7 @@
           <a:noFill/>
         </p:spPr>
         <p:txBody>
-          <a:bodyPr wrap="square" anchor="t" lIns="0" rIns="0" tIns="0" bIns="0">
+          <a:bodyPr wrap="square" lIns="0" tIns="0" rIns="0" bIns="0" anchor="t">
             <a:spAutoFit/>
           </a:bodyPr>
           <a:lstStyle/>
@@ -20883,6 +20945,7 @@
           <a:lstStyle/>
           <a:p>
             <a:pPr algn="ctr"/>
+            <a:endParaRPr/>
           </a:p>
         </p:txBody>
       </p:sp>
@@ -20927,6 +20990,7 @@
           <a:lstStyle/>
           <a:p>
             <a:pPr algn="ctr"/>
+            <a:endParaRPr/>
           </a:p>
         </p:txBody>
       </p:sp>
@@ -20947,7 +21011,7 @@
           <a:noFill/>
         </p:spPr>
         <p:txBody>
-          <a:bodyPr wrap="square" anchor="t" lIns="0" rIns="0" tIns="0" bIns="0">
+          <a:bodyPr wrap="square" lIns="0" tIns="0" rIns="0" bIns="0" anchor="t">
             <a:spAutoFit/>
           </a:bodyPr>
           <a:lstStyle/>
@@ -20986,7 +21050,7 @@
           <a:noFill/>
         </p:spPr>
         <p:txBody>
-          <a:bodyPr wrap="square" anchor="t" lIns="0" rIns="0" tIns="0" bIns="0">
+          <a:bodyPr wrap="square" lIns="0" tIns="0" rIns="0" bIns="0" anchor="t">
             <a:spAutoFit/>
           </a:bodyPr>
           <a:lstStyle/>
@@ -21051,6 +21115,7 @@
           <a:lstStyle/>
           <a:p>
             <a:pPr algn="ctr"/>
+            <a:endParaRPr/>
           </a:p>
         </p:txBody>
       </p:sp>
@@ -21071,7 +21136,7 @@
           <a:noFill/>
         </p:spPr>
         <p:txBody>
-          <a:bodyPr wrap="square" anchor="ctr" lIns="0" rIns="0" tIns="0" bIns="0">
+          <a:bodyPr wrap="square" lIns="0" tIns="0" rIns="0" bIns="0" anchor="ctr">
             <a:spAutoFit/>
           </a:bodyPr>
           <a:lstStyle/>
@@ -21119,7 +21184,7 @@
           <a:noFill/>
         </p:spPr>
         <p:txBody>
-          <a:bodyPr wrap="square" anchor="t" lIns="0" rIns="0" tIns="0" bIns="0">
+          <a:bodyPr wrap="square" lIns="0" tIns="0" rIns="0" bIns="0" anchor="t">
             <a:spAutoFit/>
           </a:bodyPr>
           <a:lstStyle/>
@@ -21158,7 +21223,7 @@
           <a:noFill/>
         </p:spPr>
         <p:txBody>
-          <a:bodyPr wrap="square" anchor="t" lIns="0" rIns="0" tIns="0" bIns="0">
+          <a:bodyPr wrap="square" lIns="0" tIns="0" rIns="0" bIns="0" anchor="t">
             <a:spAutoFit/>
           </a:bodyPr>
           <a:lstStyle/>
@@ -22882,6 +22947,7 @@
           <a:lstStyle/>
           <a:p>
             <a:pPr algn="ctr"/>
+            <a:endParaRPr/>
           </a:p>
         </p:txBody>
       </p:sp>
@@ -22909,7 +22975,7 @@
           <a:p>
             <a:pPr algn="l"/>
             <a:r>
-              <a:rPr b="1" sz="1150">
+              <a:rPr sz="1150" b="1">
                 <a:solidFill>
                   <a:srgbClr val="0E9D6E"/>
                 </a:solidFill>
@@ -22918,7 +22984,7 @@
               <a:t>Not a SOTA claim.  </a:t>
             </a:r>
             <a:r>
-              <a:rPr b="0" sz="1150">
+              <a:rPr sz="1150" b="0">
                 <a:solidFill>
                   <a:srgbClr val="201A40"/>
                 </a:solidFill>
@@ -23319,7 +23385,7 @@
 </file>
 
 <file path=ppt/slides/slide30.xml><?xml version="1.0" encoding="utf-8"?>
-<p:sld xmlns:a="http://schemas.openxmlformats.org/drawingml/2006/main" xmlns:p="http://schemas.openxmlformats.org/presentationml/2006/main" xmlns:r="http://schemas.openxmlformats.org/officeDocument/2006/relationships">
+<p:sld xmlns:a="http://schemas.openxmlformats.org/drawingml/2006/main" xmlns:r="http://schemas.openxmlformats.org/officeDocument/2006/relationships" xmlns:p="http://schemas.openxmlformats.org/presentationml/2006/main">
   <p:cSld>
     <p:bg>
       <p:bgPr>
@@ -23335,7 +23401,14 @@
         <p:cNvGrpSpPr/>
         <p:nvPr/>
       </p:nvGrpSpPr>
-      <p:grpSpPr/>
+      <p:grpSpPr>
+        <a:xfrm>
+          <a:off x="0" y="0"/>
+          <a:ext cx="0" cy="0"/>
+          <a:chOff x="0" y="0"/>
+          <a:chExt cx="0" cy="0"/>
+        </a:xfrm>
+      </p:grpSpPr>
       <p:sp>
         <p:nvSpPr>
           <p:cNvPr id="2" name="TextBox 1"/>
@@ -23353,7 +23426,7 @@
           <a:noFill/>
         </p:spPr>
         <p:txBody>
-          <a:bodyPr wrap="square" anchor="ctr" lIns="0" rIns="0" tIns="0" bIns="0">
+          <a:bodyPr wrap="square" lIns="0" tIns="0" rIns="0" bIns="0" anchor="ctr">
             <a:spAutoFit/>
           </a:bodyPr>
           <a:lstStyle/>
@@ -23418,6 +23491,7 @@
           <a:lstStyle/>
           <a:p>
             <a:pPr algn="ctr"/>
+            <a:endParaRPr/>
           </a:p>
         </p:txBody>
       </p:sp>
@@ -23438,7 +23512,7 @@
           <a:noFill/>
         </p:spPr>
         <p:txBody>
-          <a:bodyPr wrap="square" anchor="ctr" lIns="0" rIns="0" tIns="0" bIns="0">
+          <a:bodyPr wrap="square" lIns="0" tIns="0" rIns="0" bIns="0" anchor="ctr">
             <a:spAutoFit/>
           </a:bodyPr>
           <a:lstStyle/>
@@ -23477,7 +23551,7 @@
           <a:noFill/>
         </p:spPr>
         <p:txBody>
-          <a:bodyPr wrap="square" anchor="t" lIns="0" rIns="0" tIns="0" bIns="0">
+          <a:bodyPr wrap="square" lIns="0" tIns="0" rIns="0" bIns="0" anchor="t">
             <a:spAutoFit/>
           </a:bodyPr>
           <a:lstStyle/>
@@ -23544,6 +23618,7 @@
           <a:lstStyle/>
           <a:p>
             <a:pPr algn="ctr"/>
+            <a:endParaRPr/>
           </a:p>
         </p:txBody>
       </p:sp>
@@ -23616,6 +23691,7 @@
           <a:lstStyle/>
           <a:p>
             <a:pPr algn="ctr"/>
+            <a:endParaRPr/>
           </a:p>
         </p:txBody>
       </p:sp>
@@ -23688,6 +23764,7 @@
           <a:lstStyle/>
           <a:p>
             <a:pPr algn="ctr"/>
+            <a:endParaRPr/>
           </a:p>
         </p:txBody>
       </p:sp>
@@ -23760,6 +23837,7 @@
           <a:lstStyle/>
           <a:p>
             <a:pPr algn="ctr"/>
+            <a:endParaRPr/>
           </a:p>
         </p:txBody>
       </p:sp>
@@ -23804,7 +23882,7 @@
           <a:noFill/>
         </p:spPr>
         <p:txBody>
-          <a:bodyPr wrap="square" anchor="t" lIns="0" rIns="0" tIns="0" bIns="0">
+          <a:bodyPr wrap="square" lIns="0" tIns="0" rIns="0" bIns="0" anchor="t">
             <a:spAutoFit/>
           </a:bodyPr>
           <a:lstStyle/>
@@ -23843,7 +23921,7 @@
           <a:noFill/>
         </p:spPr>
         <p:txBody>
-          <a:bodyPr wrap="square" anchor="t" lIns="0" rIns="0" tIns="0" bIns="0">
+          <a:bodyPr wrap="square" lIns="0" tIns="0" rIns="0" bIns="0" anchor="t">
             <a:spAutoFit/>
           </a:bodyPr>
           <a:lstStyle/>
@@ -23909,7 +23987,7 @@
 </file>
 
 <file path=ppt/slides/slide31.xml><?xml version="1.0" encoding="utf-8"?>
-<p:sld xmlns:a="http://schemas.openxmlformats.org/drawingml/2006/main" xmlns:p="http://schemas.openxmlformats.org/presentationml/2006/main" xmlns:r="http://schemas.openxmlformats.org/officeDocument/2006/relationships">
+<p:sld xmlns:a="http://schemas.openxmlformats.org/drawingml/2006/main" xmlns:r="http://schemas.openxmlformats.org/officeDocument/2006/relationships" xmlns:p="http://schemas.openxmlformats.org/presentationml/2006/main">
   <p:cSld>
     <p:bg>
       <p:bgPr>
@@ -23925,7 +24003,14 @@
         <p:cNvGrpSpPr/>
         <p:nvPr/>
       </p:nvGrpSpPr>
-      <p:grpSpPr/>
+      <p:grpSpPr>
+        <a:xfrm>
+          <a:off x="0" y="0"/>
+          <a:ext cx="0" cy="0"/>
+          <a:chOff x="0" y="0"/>
+          <a:chExt cx="0" cy="0"/>
+        </a:xfrm>
+      </p:grpSpPr>
       <p:sp>
         <p:nvSpPr>
           <p:cNvPr id="2" name="TextBox 1"/>
@@ -23943,7 +24028,7 @@
           <a:noFill/>
         </p:spPr>
         <p:txBody>
-          <a:bodyPr wrap="square" anchor="ctr" lIns="0" rIns="0" tIns="0" bIns="0">
+          <a:bodyPr wrap="square" lIns="0" tIns="0" rIns="0" bIns="0" anchor="ctr">
             <a:spAutoFit/>
           </a:bodyPr>
           <a:lstStyle/>
@@ -24008,6 +24093,7 @@
           <a:lstStyle/>
           <a:p>
             <a:pPr algn="ctr"/>
+            <a:endParaRPr/>
           </a:p>
         </p:txBody>
       </p:sp>
@@ -24028,7 +24114,7 @@
           <a:noFill/>
         </p:spPr>
         <p:txBody>
-          <a:bodyPr wrap="square" anchor="ctr" lIns="0" rIns="0" tIns="0" bIns="0">
+          <a:bodyPr wrap="square" lIns="0" tIns="0" rIns="0" bIns="0" anchor="ctr">
             <a:spAutoFit/>
           </a:bodyPr>
           <a:lstStyle/>
@@ -24067,7 +24153,7 @@
           <a:noFill/>
         </p:spPr>
         <p:txBody>
-          <a:bodyPr wrap="square" anchor="t" lIns="0" rIns="0" tIns="0" bIns="0">
+          <a:bodyPr wrap="square" lIns="0" tIns="0" rIns="0" bIns="0" anchor="t">
             <a:spAutoFit/>
           </a:bodyPr>
           <a:lstStyle/>
@@ -24134,6 +24220,7 @@
           <a:lstStyle/>
           <a:p>
             <a:pPr algn="ctr"/>
+            <a:endParaRPr/>
           </a:p>
         </p:txBody>
       </p:sp>
@@ -24178,6 +24265,7 @@
           <a:lstStyle/>
           <a:p>
             <a:pPr algn="ctr"/>
+            <a:endParaRPr/>
           </a:p>
         </p:txBody>
       </p:sp>
@@ -24198,7 +24286,7 @@
           <a:noFill/>
         </p:spPr>
         <p:txBody>
-          <a:bodyPr wrap="square" anchor="t" lIns="0" rIns="0" tIns="0" bIns="0">
+          <a:bodyPr wrap="square" lIns="0" tIns="0" rIns="0" bIns="0" anchor="t">
             <a:spAutoFit/>
           </a:bodyPr>
           <a:lstStyle/>
@@ -24237,7 +24325,7 @@
           <a:noFill/>
         </p:spPr>
         <p:txBody>
-          <a:bodyPr wrap="square" anchor="t" lIns="0" rIns="0" tIns="0" bIns="0">
+          <a:bodyPr wrap="square" lIns="0" tIns="0" rIns="0" bIns="0" anchor="t">
             <a:spAutoFit/>
           </a:bodyPr>
           <a:lstStyle/>
@@ -24340,6 +24428,7 @@
           <a:lstStyle/>
           <a:p>
             <a:pPr algn="ctr"/>
+            <a:endParaRPr/>
           </a:p>
         </p:txBody>
       </p:sp>
@@ -24384,6 +24473,7 @@
           <a:lstStyle/>
           <a:p>
             <a:pPr algn="ctr"/>
+            <a:endParaRPr/>
           </a:p>
         </p:txBody>
       </p:sp>
@@ -24404,7 +24494,7 @@
           <a:noFill/>
         </p:spPr>
         <p:txBody>
-          <a:bodyPr wrap="square" anchor="t" lIns="0" rIns="0" tIns="0" bIns="0">
+          <a:bodyPr wrap="square" lIns="0" tIns="0" rIns="0" bIns="0" anchor="t">
             <a:spAutoFit/>
           </a:bodyPr>
           <a:lstStyle/>
@@ -24443,7 +24533,7 @@
           <a:noFill/>
         </p:spPr>
         <p:txBody>
-          <a:bodyPr wrap="square" anchor="t" lIns="0" rIns="0" tIns="0" bIns="0">
+          <a:bodyPr wrap="square" lIns="0" tIns="0" rIns="0" bIns="0" anchor="t">
             <a:spAutoFit/>
           </a:bodyPr>
           <a:lstStyle/>
@@ -24546,6 +24636,7 @@
           <a:lstStyle/>
           <a:p>
             <a:pPr algn="ctr"/>
+            <a:endParaRPr/>
           </a:p>
         </p:txBody>
       </p:sp>
@@ -24590,6 +24681,7 @@
           <a:lstStyle/>
           <a:p>
             <a:pPr algn="ctr"/>
+            <a:endParaRPr/>
           </a:p>
         </p:txBody>
       </p:sp>
@@ -24610,7 +24702,7 @@
           <a:noFill/>
         </p:spPr>
         <p:txBody>
-          <a:bodyPr wrap="square" anchor="t" lIns="0" rIns="0" tIns="0" bIns="0">
+          <a:bodyPr wrap="square" lIns="0" tIns="0" rIns="0" bIns="0" anchor="t">
             <a:spAutoFit/>
           </a:bodyPr>
           <a:lstStyle/>
@@ -24649,7 +24741,7 @@
           <a:noFill/>
         </p:spPr>
         <p:txBody>
-          <a:bodyPr wrap="square" anchor="t" lIns="0" rIns="0" tIns="0" bIns="0">
+          <a:bodyPr wrap="square" lIns="0" tIns="0" rIns="0" bIns="0" anchor="t">
             <a:spAutoFit/>
           </a:bodyPr>
           <a:lstStyle/>
@@ -24752,6 +24844,7 @@
           <a:lstStyle/>
           <a:p>
             <a:pPr algn="ctr"/>
+            <a:endParaRPr/>
           </a:p>
         </p:txBody>
       </p:sp>
@@ -24796,6 +24889,7 @@
           <a:lstStyle/>
           <a:p>
             <a:pPr algn="ctr"/>
+            <a:endParaRPr/>
           </a:p>
         </p:txBody>
       </p:sp>
@@ -24816,7 +24910,7 @@
           <a:noFill/>
         </p:spPr>
         <p:txBody>
-          <a:bodyPr wrap="square" anchor="t" lIns="0" rIns="0" tIns="0" bIns="0">
+          <a:bodyPr wrap="square" lIns="0" tIns="0" rIns="0" bIns="0" anchor="t">
             <a:spAutoFit/>
           </a:bodyPr>
           <a:lstStyle/>
@@ -24855,7 +24949,7 @@
           <a:noFill/>
         </p:spPr>
         <p:txBody>
-          <a:bodyPr wrap="square" anchor="t" lIns="0" rIns="0" tIns="0" bIns="0">
+          <a:bodyPr wrap="square" lIns="0" tIns="0" rIns="0" bIns="0" anchor="t">
             <a:spAutoFit/>
           </a:bodyPr>
           <a:lstStyle/>
@@ -24958,6 +25052,7 @@
           <a:lstStyle/>
           <a:p>
             <a:pPr algn="ctr"/>
+            <a:endParaRPr/>
           </a:p>
         </p:txBody>
       </p:sp>
@@ -25002,6 +25097,7 @@
           <a:lstStyle/>
           <a:p>
             <a:pPr algn="ctr"/>
+            <a:endParaRPr/>
           </a:p>
         </p:txBody>
       </p:sp>
@@ -25022,7 +25118,7 @@
           <a:noFill/>
         </p:spPr>
         <p:txBody>
-          <a:bodyPr wrap="square" anchor="t" lIns="0" rIns="0" tIns="0" bIns="0">
+          <a:bodyPr wrap="square" lIns="0" tIns="0" rIns="0" bIns="0" anchor="t">
             <a:spAutoFit/>
           </a:bodyPr>
           <a:lstStyle/>
@@ -25061,7 +25157,7 @@
           <a:noFill/>
         </p:spPr>
         <p:txBody>
-          <a:bodyPr wrap="square" anchor="t" lIns="0" rIns="0" tIns="0" bIns="0">
+          <a:bodyPr wrap="square" lIns="0" tIns="0" rIns="0" bIns="0" anchor="t">
             <a:spAutoFit/>
           </a:bodyPr>
           <a:lstStyle/>
@@ -25128,6 +25224,7 @@
           <a:lstStyle/>
           <a:p>
             <a:pPr algn="ctr"/>
+            <a:endParaRPr/>
           </a:p>
         </p:txBody>
       </p:sp>
@@ -25172,6 +25269,7 @@
           <a:lstStyle/>
           <a:p>
             <a:pPr algn="ctr"/>
+            <a:endParaRPr/>
           </a:p>
         </p:txBody>
       </p:sp>
@@ -25192,7 +25290,7 @@
           <a:noFill/>
         </p:spPr>
         <p:txBody>
-          <a:bodyPr wrap="square" anchor="t" lIns="0" rIns="0" tIns="0" bIns="0">
+          <a:bodyPr wrap="square" lIns="0" tIns="0" rIns="0" bIns="0" anchor="t">
             <a:spAutoFit/>
           </a:bodyPr>
           <a:lstStyle/>
@@ -25231,7 +25329,7 @@
           <a:noFill/>
         </p:spPr>
         <p:txBody>
-          <a:bodyPr wrap="square" anchor="t" lIns="0" rIns="0" tIns="0" bIns="0">
+          <a:bodyPr wrap="square" lIns="0" tIns="0" rIns="0" bIns="0" anchor="t">
             <a:spAutoFit/>
           </a:bodyPr>
           <a:lstStyle/>
@@ -25322,6 +25420,7 @@
           <a:lstStyle/>
           <a:p>
             <a:pPr algn="ctr"/>
+            <a:endParaRPr/>
           </a:p>
         </p:txBody>
       </p:sp>
@@ -25366,6 +25465,7 @@
           <a:lstStyle/>
           <a:p>
             <a:pPr algn="ctr"/>
+            <a:endParaRPr/>
           </a:p>
         </p:txBody>
       </p:sp>
@@ -25386,7 +25486,7 @@
           <a:noFill/>
         </p:spPr>
         <p:txBody>
-          <a:bodyPr wrap="square" anchor="t" lIns="0" rIns="0" tIns="0" bIns="0">
+          <a:bodyPr wrap="square" lIns="0" tIns="0" rIns="0" bIns="0" anchor="t">
             <a:spAutoFit/>
           </a:bodyPr>
           <a:lstStyle/>
@@ -25425,7 +25525,7 @@
           <a:noFill/>
         </p:spPr>
         <p:txBody>
-          <a:bodyPr wrap="square" anchor="t" lIns="0" rIns="0" tIns="0" bIns="0">
+          <a:bodyPr wrap="square" lIns="0" tIns="0" rIns="0" bIns="0" anchor="t">
             <a:spAutoFit/>
           </a:bodyPr>
           <a:lstStyle/>
@@ -25492,6 +25592,7 @@
           <a:lstStyle/>
           <a:p>
             <a:pPr algn="ctr"/>
+            <a:endParaRPr/>
           </a:p>
         </p:txBody>
       </p:sp>
@@ -25536,6 +25637,7 @@
           <a:lstStyle/>
           <a:p>
             <a:pPr algn="ctr"/>
+            <a:endParaRPr/>
           </a:p>
         </p:txBody>
       </p:sp>
@@ -25556,7 +25658,7 @@
           <a:noFill/>
         </p:spPr>
         <p:txBody>
-          <a:bodyPr wrap="square" anchor="t" lIns="0" rIns="0" tIns="0" bIns="0">
+          <a:bodyPr wrap="square" lIns="0" tIns="0" rIns="0" bIns="0" anchor="t">
             <a:spAutoFit/>
           </a:bodyPr>
           <a:lstStyle/>
@@ -25595,7 +25697,7 @@
           <a:noFill/>
         </p:spPr>
         <p:txBody>
-          <a:bodyPr wrap="square" anchor="t" lIns="0" rIns="0" tIns="0" bIns="0">
+          <a:bodyPr wrap="square" lIns="0" tIns="0" rIns="0" bIns="0" anchor="t">
             <a:spAutoFit/>
           </a:bodyPr>
           <a:lstStyle/>
@@ -25634,7 +25736,7 @@
           <a:noFill/>
         </p:spPr>
         <p:txBody>
-          <a:bodyPr wrap="square" anchor="t" lIns="0" rIns="0" tIns="0" bIns="0">
+          <a:bodyPr wrap="square" lIns="0" tIns="0" rIns="0" bIns="0" anchor="t">
             <a:spAutoFit/>
           </a:bodyPr>
           <a:lstStyle/>
@@ -25673,7 +25775,7 @@
           <a:noFill/>
         </p:spPr>
         <p:txBody>
-          <a:bodyPr wrap="square" anchor="t" lIns="0" rIns="0" tIns="0" bIns="0">
+          <a:bodyPr wrap="square" lIns="0" tIns="0" rIns="0" bIns="0" anchor="t">
             <a:spAutoFit/>
           </a:bodyPr>
           <a:lstStyle/>
@@ -29020,7 +29122,7 @@
 </file>
 
 <file path=ppt/slides/slide4.xml><?xml version="1.0" encoding="utf-8"?>
-<p:sld xmlns:a="http://schemas.openxmlformats.org/drawingml/2006/main" xmlns:p="http://schemas.openxmlformats.org/presentationml/2006/main" xmlns:r="http://schemas.openxmlformats.org/officeDocument/2006/relationships">
+<p:sld xmlns:a="http://schemas.openxmlformats.org/drawingml/2006/main" xmlns:r="http://schemas.openxmlformats.org/officeDocument/2006/relationships" xmlns:p="http://schemas.openxmlformats.org/presentationml/2006/main">
   <p:cSld>
     <p:bg>
       <p:bgPr>
@@ -29036,7 +29138,14 @@
         <p:cNvGrpSpPr/>
         <p:nvPr/>
       </p:nvGrpSpPr>
-      <p:grpSpPr/>
+      <p:grpSpPr>
+        <a:xfrm>
+          <a:off x="0" y="0"/>
+          <a:ext cx="0" cy="0"/>
+          <a:chOff x="0" y="0"/>
+          <a:chExt cx="0" cy="0"/>
+        </a:xfrm>
+      </p:grpSpPr>
       <p:sp>
         <p:nvSpPr>
           <p:cNvPr id="2" name="TextBox 1"/>
@@ -29054,7 +29163,7 @@
           <a:noFill/>
         </p:spPr>
         <p:txBody>
-          <a:bodyPr wrap="square" anchor="ctr" lIns="0" rIns="0" tIns="0" bIns="0">
+          <a:bodyPr wrap="square" lIns="0" tIns="0" rIns="0" bIns="0" anchor="ctr">
             <a:spAutoFit/>
           </a:bodyPr>
           <a:lstStyle/>
@@ -29089,7 +29198,7 @@
           <a:noFill/>
         </p:spPr>
         <p:txBody>
-          <a:bodyPr wrap="square" anchor="t" lIns="0" rIns="0" tIns="0" bIns="0">
+          <a:bodyPr wrap="square" lIns="0" tIns="0" rIns="0" bIns="0" anchor="t">
             <a:spAutoFit/>
           </a:bodyPr>
           <a:lstStyle/>
@@ -29152,6 +29261,7 @@
           <a:lstStyle/>
           <a:p>
             <a:pPr algn="ctr"/>
+            <a:endParaRPr/>
           </a:p>
         </p:txBody>
       </p:sp>
@@ -29200,6 +29310,7 @@
           <a:lstStyle/>
           <a:p>
             <a:pPr algn="ctr"/>
+            <a:endParaRPr/>
           </a:p>
         </p:txBody>
       </p:sp>
@@ -29248,6 +29359,7 @@
           <a:lstStyle/>
           <a:p>
             <a:pPr algn="ctr"/>
+            <a:endParaRPr/>
           </a:p>
         </p:txBody>
       </p:sp>
@@ -29296,6 +29408,7 @@
           <a:lstStyle/>
           <a:p>
             <a:pPr algn="ctr"/>
+            <a:endParaRPr/>
           </a:p>
         </p:txBody>
       </p:sp>
@@ -29316,7 +29429,7 @@
           <a:noFill/>
         </p:spPr>
         <p:txBody>
-          <a:bodyPr wrap="square" anchor="t" lIns="0" rIns="0" tIns="0" bIns="0">
+          <a:bodyPr wrap="square" lIns="0" tIns="0" rIns="0" bIns="0" anchor="t">
             <a:spAutoFit/>
           </a:bodyPr>
           <a:lstStyle/>
@@ -29386,7 +29499,7 @@
           <a:noFill/>
         </p:spPr>
         <p:txBody>
-          <a:bodyPr wrap="square" lIns="25400" rIns="25400" tIns="12700" bIns="12700">
+          <a:bodyPr wrap="square" lIns="25400" tIns="12700" rIns="25400" bIns="12700">
             <a:spAutoFit/>
           </a:bodyPr>
           <a:lstStyle/>
@@ -29451,6 +29564,7 @@
           <a:lstStyle/>
           <a:p>
             <a:pPr algn="ctr"/>
+            <a:endParaRPr/>
           </a:p>
         </p:txBody>
       </p:sp>
@@ -29471,7 +29585,7 @@
           <a:noFill/>
         </p:spPr>
         <p:txBody>
-          <a:bodyPr wrap="square" lIns="25400" rIns="25400" tIns="12700" bIns="12700">
+          <a:bodyPr wrap="square" lIns="25400" tIns="12700" rIns="25400" bIns="12700">
             <a:spAutoFit/>
           </a:bodyPr>
           <a:lstStyle/>
@@ -29654,7 +29768,7 @@
           <a:noFill/>
         </p:spPr>
         <p:txBody>
-          <a:bodyPr wrap="square" lIns="25400" rIns="25400" tIns="12700" bIns="12700">
+          <a:bodyPr wrap="square" lIns="25400" tIns="12700" rIns="25400" bIns="12700">
             <a:spAutoFit/>
           </a:bodyPr>
           <a:lstStyle/>
@@ -29719,6 +29833,7 @@
           <a:lstStyle/>
           <a:p>
             <a:pPr algn="ctr"/>
+            <a:endParaRPr/>
           </a:p>
         </p:txBody>
       </p:sp>
@@ -29739,7 +29854,7 @@
           <a:noFill/>
         </p:spPr>
         <p:txBody>
-          <a:bodyPr wrap="square" lIns="25400" rIns="25400" tIns="12700" bIns="12700">
+          <a:bodyPr wrap="square" lIns="25400" tIns="12700" rIns="25400" bIns="12700">
             <a:spAutoFit/>
           </a:bodyPr>
           <a:lstStyle/>
@@ -29874,7 +29989,7 @@
           <a:noFill/>
         </p:spPr>
         <p:txBody>
-          <a:bodyPr wrap="square" lIns="25400" rIns="25400" tIns="12700" bIns="12700">
+          <a:bodyPr wrap="square" lIns="25400" tIns="12700" rIns="25400" bIns="12700">
             <a:spAutoFit/>
           </a:bodyPr>
           <a:lstStyle/>
@@ -29939,6 +30054,7 @@
           <a:lstStyle/>
           <a:p>
             <a:pPr algn="ctr"/>
+            <a:endParaRPr/>
           </a:p>
         </p:txBody>
       </p:sp>
@@ -29959,7 +30075,7 @@
           <a:noFill/>
         </p:spPr>
         <p:txBody>
-          <a:bodyPr wrap="square" lIns="25400" rIns="25400" tIns="12700" bIns="12700">
+          <a:bodyPr wrap="square" lIns="25400" tIns="12700" rIns="25400" bIns="12700">
             <a:spAutoFit/>
           </a:bodyPr>
           <a:lstStyle/>
@@ -30094,7 +30210,7 @@
           <a:noFill/>
         </p:spPr>
         <p:txBody>
-          <a:bodyPr wrap="square" lIns="25400" rIns="25400" tIns="12700" bIns="12700">
+          <a:bodyPr wrap="square" lIns="25400" tIns="12700" rIns="25400" bIns="12700">
             <a:spAutoFit/>
           </a:bodyPr>
           <a:lstStyle/>
@@ -30159,6 +30275,7 @@
           <a:lstStyle/>
           <a:p>
             <a:pPr algn="ctr"/>
+            <a:endParaRPr/>
           </a:p>
         </p:txBody>
       </p:sp>
@@ -30179,7 +30296,7 @@
           <a:noFill/>
         </p:spPr>
         <p:txBody>
-          <a:bodyPr wrap="square" lIns="25400" rIns="25400" tIns="12700" bIns="12700">
+          <a:bodyPr wrap="square" lIns="25400" tIns="12700" rIns="25400" bIns="12700">
             <a:spAutoFit/>
           </a:bodyPr>
           <a:lstStyle/>
@@ -30354,7 +30471,7 @@
           <p:nvPr/>
         </p:nvPicPr>
         <p:blipFill>
-          <a:blip r:embed="rId6"/>
+          <a:blip r:embed="rId2"/>
           <a:stretch>
             <a:fillRect/>
           </a:stretch>
@@ -30378,7 +30495,7 @@
           <p:nvPr/>
         </p:nvPicPr>
         <p:blipFill>
-          <a:blip r:embed="rId7"/>
+          <a:blip r:embed="rId3"/>
           <a:stretch>
             <a:fillRect/>
           </a:stretch>
@@ -30402,7 +30519,7 @@
           <p:nvPr/>
         </p:nvPicPr>
         <p:blipFill>
-          <a:blip r:embed="rId8"/>
+          <a:blip r:embed="rId4"/>
           <a:stretch>
             <a:fillRect/>
           </a:stretch>
@@ -30426,7 +30543,7 @@
           <p:nvPr/>
         </p:nvPicPr>
         <p:blipFill>
-          <a:blip r:embed="rId9"/>
+          <a:blip r:embed="rId5"/>
           <a:stretch>
             <a:fillRect/>
           </a:stretch>
